--- a/modulo-05/05.00_RAP_e_Fiori_elements_a_jornada_completa.pptx
+++ b/modulo-05/05.00_RAP_e_Fiori_elements_a_jornada_completa.pptx
@@ -1194,7 +1194,7 @@
                   <a:srgbClr val="8FA3C7"/>
                 </a:solidFill>
               </a:rPr>
-              <a:t>ABAP Moderno · Módulo 03 — SAP Fiori Elements com OData V4  ·  Visão geral do módulo</a:t>
+              <a:t>ABAP Moderno · Módulo 05 — SAP Fiori Elements com OData V4  ·  Visão geral do módulo</a:t>
             </a:r>
             <a:endParaRPr lang="en-US" sz="900" dirty="0"/>
           </a:p>
@@ -1340,7 +1340,7 @@
                   <a:srgbClr val="556B82"/>
                 </a:solidFill>
               </a:rPr>
-              <a:t>ABAP Moderno · Módulo 03 — SAP Fiori Elements com OData V4  ·  Visão geral do módulo</a:t>
+              <a:t>ABAP Moderno · Módulo 05 — SAP Fiori Elements com OData V4  ·  Visão geral do módulo</a:t>
             </a:r>
             <a:endParaRPr lang="en-US" sz="900" dirty="0"/>
           </a:p>
@@ -1771,7 +1771,7 @@
                   <a:srgbClr val="89D1FF"/>
                 </a:solidFill>
               </a:rPr>
-              <a:t>MÓDULO 03 · VISÃO GERAL</a:t>
+              <a:t>MÓDULO 05 · VISÃO GERAL</a:t>
             </a:r>
             <a:endParaRPr lang="en-US" sz="1400" dirty="0"/>
           </a:p>
@@ -1843,7 +1843,7 @@
                   <a:srgbClr val="D1EFFF"/>
                 </a:solidFill>
               </a:rPr>
-              <a:t>Visão geral do módulo 03: do serviço OData V4 do RAP ao app Manage Travels publicado, configurado com anotações e SAP Fiori tools.</a:t>
+              <a:t>Visão geral do módulo 05: do serviço OData V4 do RAP ao app Pedidos de Compras publicado, configurado com anotações e SAP Fiori tools.</a:t>
             </a:r>
             <a:endParaRPr lang="en-US" sz="1700" dirty="0"/>
           </a:p>
@@ -2201,7 +2201,7 @@
                   <a:srgbClr val="8FA3C7"/>
                 </a:solidFill>
               </a:rPr>
-              <a:t>ABAP Moderno · Módulo 03 — SAP Fiori Elements com OData V4 · Design System SAP Horizon</a:t>
+              <a:t>ABAP Moderno · Módulo 05 — SAP Fiori Elements com OData V4 · Design System SAP Horizon</a:t>
             </a:r>
             <a:endParaRPr lang="en-US" sz="1100" dirty="0"/>
           </a:p>
@@ -4212,8 +4212,8 @@
         </p:blipFill>
         <p:spPr>
           <a:xfrm>
-            <a:off x="1696669" y="1847088"/>
-            <a:ext cx="347472" cy="347472"/>
+            <a:off x="749808" y="5751576"/>
+            <a:ext cx="310896" cy="310896"/>
           </a:xfrm>
           <a:prstGeom prst="rect">
             <a:avLst/>
@@ -4260,7 +4260,7 @@
         </p:blipFill>
         <p:spPr>
           <a:xfrm>
-            <a:off x="5455768" y="1847088"/>
+            <a:off x="1696669" y="1847088"/>
             <a:ext cx="347472" cy="347472"/>
           </a:xfrm>
           <a:prstGeom prst="rect">
@@ -4284,7 +4284,7 @@
         </p:blipFill>
         <p:spPr>
           <a:xfrm>
-            <a:off x="7335317" y="1847088"/>
+            <a:off x="5455768" y="1847088"/>
             <a:ext cx="347472" cy="347472"/>
           </a:xfrm>
           <a:prstGeom prst="rect">
@@ -4308,7 +4308,7 @@
         </p:blipFill>
         <p:spPr>
           <a:xfrm>
-            <a:off x="9214866" y="1847088"/>
+            <a:off x="11094415" y="1847088"/>
             <a:ext cx="347472" cy="347472"/>
           </a:xfrm>
           <a:prstGeom prst="rect">
@@ -4332,7 +4332,7 @@
         </p:blipFill>
         <p:spPr>
           <a:xfrm>
-            <a:off x="11094415" y="1847088"/>
+            <a:off x="7335317" y="1847088"/>
             <a:ext cx="347472" cy="347472"/>
           </a:xfrm>
           <a:prstGeom prst="rect">
@@ -4380,7 +4380,7 @@
         </p:blipFill>
         <p:spPr>
           <a:xfrm>
-            <a:off x="3576218" y="3858768"/>
+            <a:off x="9214866" y="1847088"/>
             <a:ext cx="347472" cy="347472"/>
           </a:xfrm>
           <a:prstGeom prst="rect">
@@ -4404,7 +4404,7 @@
         </p:blipFill>
         <p:spPr>
           <a:xfrm>
-            <a:off x="5455768" y="3858768"/>
+            <a:off x="3576218" y="3858768"/>
             <a:ext cx="347472" cy="347472"/>
           </a:xfrm>
           <a:prstGeom prst="rect">
@@ -4428,7 +4428,7 @@
         </p:blipFill>
         <p:spPr>
           <a:xfrm>
-            <a:off x="7335317" y="3858768"/>
+            <a:off x="5455768" y="3858768"/>
             <a:ext cx="347472" cy="347472"/>
           </a:xfrm>
           <a:prstGeom prst="rect">
@@ -4476,8 +4476,8 @@
         </p:blipFill>
         <p:spPr>
           <a:xfrm>
-            <a:off x="749808" y="5751576"/>
-            <a:ext cx="310896" cy="310896"/>
+            <a:off x="7335317" y="3858768"/>
+            <a:ext cx="347472" cy="347472"/>
           </a:xfrm>
           <a:prstGeom prst="rect">
             <a:avLst/>
@@ -4856,7 +4856,7 @@
                   <a:srgbClr val="1D2D3E"/>
                 </a:solidFill>
               </a:rPr>
-              <a:t>Manage Travels</a:t>
+              <a:t>Pedidos de Compras</a:t>
             </a:r>
             <a:endParaRPr lang="en-US" sz="1400" dirty="0"/>
           </a:p>
@@ -4870,7 +4870,7 @@
                   <a:srgbClr val="556B82"/>
                 </a:solidFill>
               </a:rPr>
-              <a:t>construído ao longo do módulo</a:t>
+              <a:t>o app do projeto acompanha o módulo</a:t>
             </a:r>
             <a:endParaRPr lang="en-US" sz="1400" dirty="0"/>
           </a:p>
@@ -5260,7 +5260,7 @@
                   <a:srgbClr val="556B82"/>
                 </a:solidFill>
               </a:rPr>
-              <a:t> à trilha </a:t>
+              <a:t>, fora da jornada </a:t>
             </a:r>
             <a:r>
               <a:rPr lang="en-US" sz="1200" b="1" dirty="0">
@@ -5268,7 +5268,7 @@
                   <a:srgbClr val="556B82"/>
                 </a:solidFill>
               </a:rPr>
-              <a:t>01 → 04 → 02 → 05</a:t>
+              <a:t>01 → 02 → 03 → 04</a:t>
             </a:r>
             <a:r>
               <a:rPr lang="en-US" sz="1200" dirty="0">
@@ -5892,7 +5892,7 @@
                   <a:srgbClr val="89D1FF"/>
                 </a:solidFill>
               </a:rPr>
-              <a:t>MÓDULO 03 · VISÃO GERAL · SEÇÃO 1</a:t>
+              <a:t>MÓDULO 05 · VISÃO GERAL · SEÇÃO 1</a:t>
             </a:r>
             <a:endParaRPr lang="en-US" sz="1300" dirty="0"/>
           </a:p>
@@ -6133,7 +6133,7 @@
                   <a:srgbClr val="D1EFFF"/>
                 </a:solidFill>
               </a:rPr>
-              <a:t>  03.01 · 03.02</a:t>
+              <a:t>  05.01 · 05.02</a:t>
             </a:r>
             <a:endParaRPr lang="en-US" sz="1400" dirty="0"/>
           </a:p>
@@ -6180,7 +6180,7 @@
                   <a:srgbClr val="D1EFFF"/>
                 </a:solidFill>
               </a:rPr>
-              <a:t>  03.03 · 03.05</a:t>
+              <a:t>  05.03 · 05.05</a:t>
             </a:r>
             <a:endParaRPr lang="en-US" sz="1400" dirty="0"/>
           </a:p>
@@ -6227,7 +6227,7 @@
                   <a:srgbClr val="D1EFFF"/>
                 </a:solidFill>
               </a:rPr>
-              <a:t>  03.04 · 03.06–03.10</a:t>
+              <a:t>  05.04 · 05.06–05.10</a:t>
             </a:r>
             <a:endParaRPr lang="en-US" sz="1400" dirty="0"/>
           </a:p>
@@ -6274,7 +6274,7 @@
                   <a:srgbClr val="D1EFFF"/>
                 </a:solidFill>
               </a:rPr>
-              <a:t>  03.11</a:t>
+              <a:t>  05.11</a:t>
             </a:r>
             <a:endParaRPr lang="en-US" sz="1400" dirty="0"/>
           </a:p>
@@ -7134,7 +7134,7 @@
                   <a:srgbClr val="556B82"/>
                 </a:solidFill>
               </a:rPr>
-              <a:t>Viagens, bookings e o app Manage Travels do começo ao fim.</a:t>
+              <a:t>Pedidos, itens, pagamento e o app Pedidos de Compras do começo ao fim.</a:t>
             </a:r>
             <a:endParaRPr lang="en-US" sz="1400" dirty="0"/>
           </a:p>
@@ -7156,8 +7156,8 @@
         </p:blipFill>
         <p:spPr>
           <a:xfrm>
-            <a:off x="1598257" y="2084832"/>
-            <a:ext cx="365760" cy="365760"/>
+            <a:off x="8368711" y="3928994"/>
+            <a:ext cx="225308" cy="225308"/>
           </a:xfrm>
           <a:prstGeom prst="rect">
             <a:avLst/>
@@ -7180,7 +7180,7 @@
         </p:blipFill>
         <p:spPr>
           <a:xfrm>
-            <a:off x="4474731" y="2084832"/>
+            <a:off x="1598257" y="2084832"/>
             <a:ext cx="365760" cy="365760"/>
           </a:xfrm>
           <a:prstGeom prst="rect">
@@ -7204,7 +7204,7 @@
         </p:blipFill>
         <p:spPr>
           <a:xfrm>
-            <a:off x="7351205" y="2084832"/>
+            <a:off x="4474731" y="2084832"/>
             <a:ext cx="365760" cy="365760"/>
           </a:xfrm>
           <a:prstGeom prst="rect">
@@ -7252,8 +7252,8 @@
         </p:blipFill>
         <p:spPr>
           <a:xfrm>
-            <a:off x="4594372" y="3928994"/>
-            <a:ext cx="225308" cy="225308"/>
+            <a:off x="7351205" y="2084832"/>
+            <a:ext cx="365760" cy="365760"/>
           </a:xfrm>
           <a:prstGeom prst="rect">
             <a:avLst/>
@@ -7276,7 +7276,7 @@
         </p:blipFill>
         <p:spPr>
           <a:xfrm>
-            <a:off x="820034" y="3928994"/>
+            <a:off x="4594372" y="3928994"/>
             <a:ext cx="225308" cy="225308"/>
           </a:xfrm>
           <a:prstGeom prst="rect">
@@ -7300,7 +7300,7 @@
         </p:blipFill>
         <p:spPr>
           <a:xfrm>
-            <a:off x="8368711" y="3928994"/>
+            <a:off x="820034" y="3928994"/>
             <a:ext cx="225308" cy="225308"/>
           </a:xfrm>
           <a:prstGeom prst="rect">
@@ -7561,7 +7561,7 @@
                   <a:srgbClr val="556B82"/>
                 </a:solidFill>
               </a:rPr>
-              <a:t>Fiori elements e OData V4 (03.01)</a:t>
+              <a:t>Fiori elements e OData V4 (05.01)</a:t>
             </a:r>
             <a:endParaRPr lang="en-US" sz="1400" dirty="0"/>
           </a:p>
@@ -7579,7 +7579,7 @@
                   <a:srgbClr val="556B82"/>
                 </a:solidFill>
               </a:rPr>
-              <a:t>Exposição de serviços (03.02)</a:t>
+              <a:t>Exposição de serviços (05.02)</a:t>
             </a:r>
             <a:endParaRPr lang="en-US" sz="1400" dirty="0"/>
           </a:p>
@@ -7692,7 +7692,7 @@
                   <a:srgbClr val="556B82"/>
                 </a:solidFill>
               </a:rPr>
-              <a:t>Anotações de UI (03.03)</a:t>
+              <a:t>Anotações de UI (05.03)</a:t>
             </a:r>
             <a:endParaRPr lang="en-US" sz="1400" dirty="0"/>
           </a:p>
@@ -7710,7 +7710,7 @@
                   <a:srgbClr val="556B82"/>
                 </a:solidFill>
               </a:rPr>
-              <a:t>Floorplans e facetas (03.05)</a:t>
+              <a:t>Floorplans e facetas (05.05)</a:t>
             </a:r>
             <a:endParaRPr lang="en-US" sz="1400" dirty="0"/>
           </a:p>
@@ -7728,7 +7728,7 @@
                   <a:srgbClr val="556B82"/>
                 </a:solidFill>
               </a:rPr>
-              <a:t>List Report e Object Page (03.06)</a:t>
+              <a:t>List Report e Object Page (05.06)</a:t>
             </a:r>
             <a:endParaRPr lang="en-US" sz="1400" dirty="0"/>
           </a:p>
@@ -7841,7 +7841,7 @@
                   <a:srgbClr val="556B82"/>
                 </a:solidFill>
               </a:rPr>
-              <a:t>Fiori tools (03.04)</a:t>
+              <a:t>Fiori tools (05.04)</a:t>
             </a:r>
             <a:endParaRPr lang="en-US" sz="1400" dirty="0"/>
           </a:p>
@@ -7859,7 +7859,7 @@
                   <a:srgbClr val="556B82"/>
                 </a:solidFill>
               </a:rPr>
-              <a:t>Cores e ações (03.07)</a:t>
+              <a:t>Cores e ações (05.07)</a:t>
             </a:r>
             <a:endParaRPr lang="en-US" sz="1400" dirty="0"/>
           </a:p>
@@ -7877,7 +7877,7 @@
                   <a:srgbClr val="556B82"/>
                 </a:solidFill>
               </a:rPr>
-              <a:t>Navegação (03.08)</a:t>
+              <a:t>Navegação (05.08)</a:t>
             </a:r>
             <a:endParaRPr lang="en-US" sz="1400" dirty="0"/>
           </a:p>
@@ -7895,7 +7895,7 @@
                   <a:srgbClr val="556B82"/>
                 </a:solidFill>
               </a:rPr>
-              <a:t>Object Page avançada (03.09)</a:t>
+              <a:t>Object Page avançada (05.09)</a:t>
             </a:r>
             <a:endParaRPr lang="en-US" sz="1400" dirty="0"/>
           </a:p>
@@ -8008,7 +8008,7 @@
                   <a:srgbClr val="556B82"/>
                 </a:solidFill>
               </a:rPr>
-              <a:t>Flexible Programming Model (03.10)</a:t>
+              <a:t>Flexible Programming Model (05.10)</a:t>
             </a:r>
             <a:endParaRPr lang="en-US" sz="1400" dirty="0"/>
           </a:p>
@@ -8026,7 +8026,7 @@
                   <a:srgbClr val="556B82"/>
                 </a:solidFill>
               </a:rPr>
-              <a:t>Deploy e acesso (03.11)</a:t>
+              <a:t>Deploy e acesso (05.11)</a:t>
             </a:r>
             <a:endParaRPr lang="en-US" sz="1400" dirty="0"/>
           </a:p>
@@ -8072,7 +8072,7 @@
         </p:blipFill>
         <p:spPr>
           <a:xfrm>
-            <a:off x="9342653" y="2673096"/>
+            <a:off x="3681146" y="2673096"/>
             <a:ext cx="256032" cy="256032"/>
           </a:xfrm>
           <a:prstGeom prst="rect">
@@ -8096,7 +8096,7 @@
         </p:blipFill>
         <p:spPr>
           <a:xfrm>
-            <a:off x="6511900" y="2673096"/>
+            <a:off x="9342653" y="2673096"/>
             <a:ext cx="256032" cy="256032"/>
           </a:xfrm>
           <a:prstGeom prst="rect">
@@ -8120,7 +8120,7 @@
         </p:blipFill>
         <p:spPr>
           <a:xfrm>
-            <a:off x="3681146" y="2673096"/>
+            <a:off x="6511900" y="2673096"/>
             <a:ext cx="256032" cy="256032"/>
           </a:xfrm>
           <a:prstGeom prst="rect">
@@ -8769,7 +8769,7 @@
                   <a:srgbClr val="89D1FF"/>
                 </a:solidFill>
               </a:rPr>
-              <a:t>Próxima aula · 03.01  </a:t>
+              <a:t>Próxima aula · 05.01  </a:t>
             </a:r>
             <a:r>
               <a:rPr lang="en-US" sz="1500" dirty="0">
